--- a/09.busqueda-de-soluciones-informada.pptx
+++ b/09.busqueda-de-soluciones-informada.pptx
@@ -5,7 +5,7 @@
     <p:sldMasterId id="2147483659" r:id="rId1"/>
   </p:sldMasterIdLst>
   <p:notesMasterIdLst>
-    <p:notesMasterId r:id="rId40"/>
+    <p:notesMasterId r:id="rId41"/>
   </p:notesMasterIdLst>
   <p:sldIdLst>
     <p:sldId id="256" r:id="rId2"/>
@@ -45,29 +45,30 @@
     <p:sldId id="289" r:id="rId36"/>
     <p:sldId id="293" r:id="rId37"/>
     <p:sldId id="290" r:id="rId38"/>
-    <p:sldId id="292" r:id="rId39"/>
+    <p:sldId id="294" r:id="rId39"/>
+    <p:sldId id="292" r:id="rId40"/>
   </p:sldIdLst>
   <p:sldSz cx="9144000" cy="5143500" type="screen16x9"/>
   <p:notesSz cx="6858000" cy="9144000"/>
   <p:embeddedFontLst>
     <p:embeddedFont>
       <p:font typeface="Georgia" panose="02040502050405020303" pitchFamily="18" charset="0"/>
-      <p:regular r:id="rId41"/>
-      <p:bold r:id="rId42"/>
-      <p:italic r:id="rId43"/>
-      <p:boldItalic r:id="rId44"/>
+      <p:regular r:id="rId42"/>
+      <p:bold r:id="rId43"/>
+      <p:italic r:id="rId44"/>
+      <p:boldItalic r:id="rId45"/>
     </p:embeddedFont>
     <p:embeddedFont>
       <p:font typeface="Open Sans" panose="020B0606030504020204" pitchFamily="34" charset="0"/>
-      <p:regular r:id="rId45"/>
-      <p:bold r:id="rId46"/>
-      <p:italic r:id="rId47"/>
-      <p:boldItalic r:id="rId48"/>
+      <p:regular r:id="rId46"/>
+      <p:bold r:id="rId47"/>
+      <p:italic r:id="rId48"/>
+      <p:boldItalic r:id="rId49"/>
     </p:embeddedFont>
     <p:embeddedFont>
-      <p:font typeface="PT Sans Narrow" panose="020F0502020204030204" pitchFamily="34" charset="0"/>
-      <p:regular r:id="rId49"/>
-      <p:bold r:id="rId50"/>
+      <p:font typeface="PT Sans Narrow" panose="020B0506020203020204" pitchFamily="34" charset="0"/>
+      <p:regular r:id="rId50"/>
+      <p:bold r:id="rId51"/>
     </p:embeddedFont>
   </p:embeddedFontLst>
   <p:defaultTextStyle>
@@ -321,232 +322,50 @@
 <file path=ppt/changesInfos/changesInfo1.xml><?xml version="1.0" encoding="utf-8"?>
 <pc:chgInfo xmlns:a="http://schemas.openxmlformats.org/drawingml/2006/main" xmlns:r="http://schemas.openxmlformats.org/officeDocument/2006/relationships" xmlns:ac="http://schemas.microsoft.com/office/drawing/2013/main/command" xmlns:pc="http://schemas.microsoft.com/office/powerpoint/2013/main/command">
   <pc:docChgLst>
-    <pc:chgData name="Norbey Muñoz" userId="b7e811e8891ccd42" providerId="LiveId" clId="{6058E430-35B6-423D-B594-93A405837EA3}"/>
-    <pc:docChg chg="modSld">
-      <pc:chgData name="Norbey Muñoz" userId="b7e811e8891ccd42" providerId="LiveId" clId="{6058E430-35B6-423D-B594-93A405837EA3}" dt="2025-05-07T13:13:30.952" v="2"/>
+    <pc:chgData name="Norbey Muñoz" userId="b7e811e8891ccd42" providerId="LiveId" clId="{7A9D10B8-45EB-48FB-89DA-3B884F36BEE7}"/>
+    <pc:docChg chg="custSel addSld modSld">
+      <pc:chgData name="Norbey Muñoz" userId="b7e811e8891ccd42" providerId="LiveId" clId="{7A9D10B8-45EB-48FB-89DA-3B884F36BEE7}" dt="2026-07-31T17:48:08.840" v="98" actId="34476"/>
       <pc:docMkLst>
         <pc:docMk/>
       </pc:docMkLst>
-      <pc:sldChg chg="modNotesTx">
-        <pc:chgData name="Norbey Muñoz" userId="b7e811e8891ccd42" providerId="LiveId" clId="{6058E430-35B6-423D-B594-93A405837EA3}" dt="2025-05-07T13:13:30.952" v="2"/>
+      <pc:sldChg chg="addSp delSp modSp add mod modShow">
+        <pc:chgData name="Norbey Muñoz" userId="b7e811e8891ccd42" providerId="LiveId" clId="{7A9D10B8-45EB-48FB-89DA-3B884F36BEE7}" dt="2026-07-31T17:48:08.840" v="98" actId="34476"/>
         <pc:sldMkLst>
           <pc:docMk/>
-          <pc:sldMk cId="2853472517" sldId="289"/>
+          <pc:sldMk cId="3367549514" sldId="294"/>
         </pc:sldMkLst>
-      </pc:sldChg>
-    </pc:docChg>
-  </pc:docChgLst>
-  <pc:docChgLst>
-    <pc:chgData name="Norbey Muñoz" userId="b7e811e8891ccd42" providerId="LiveId" clId="{C4605D06-283C-4236-936F-60D609F647F8}"/>
-    <pc:docChg chg="undo custSel addSld modSld sldOrd">
-      <pc:chgData name="Norbey Muñoz" userId="b7e811e8891ccd42" providerId="LiveId" clId="{C4605D06-283C-4236-936F-60D609F647F8}" dt="2024-10-21T20:49:36.016" v="649" actId="20577"/>
-      <pc:docMkLst>
-        <pc:docMk/>
-      </pc:docMkLst>
-      <pc:sldChg chg="modNotesTx">
-        <pc:chgData name="Norbey Muñoz" userId="b7e811e8891ccd42" providerId="LiveId" clId="{C4605D06-283C-4236-936F-60D609F647F8}" dt="2024-10-16T21:42:50.853" v="353" actId="20577"/>
-        <pc:sldMkLst>
-          <pc:docMk/>
-          <pc:sldMk cId="0" sldId="273"/>
-        </pc:sldMkLst>
-      </pc:sldChg>
-      <pc:sldChg chg="modNotesTx">
-        <pc:chgData name="Norbey Muñoz" userId="b7e811e8891ccd42" providerId="LiveId" clId="{C4605D06-283C-4236-936F-60D609F647F8}" dt="2024-10-16T21:38:06.220" v="297" actId="5793"/>
-        <pc:sldMkLst>
-          <pc:docMk/>
-          <pc:sldMk cId="0" sldId="274"/>
-        </pc:sldMkLst>
-      </pc:sldChg>
-      <pc:sldChg chg="modNotesTx">
-        <pc:chgData name="Norbey Muñoz" userId="b7e811e8891ccd42" providerId="LiveId" clId="{C4605D06-283C-4236-936F-60D609F647F8}" dt="2024-10-21T20:49:04.716" v="644"/>
-        <pc:sldMkLst>
-          <pc:docMk/>
-          <pc:sldMk cId="0" sldId="275"/>
-        </pc:sldMkLst>
-      </pc:sldChg>
-      <pc:sldChg chg="modNotesTx">
-        <pc:chgData name="Norbey Muñoz" userId="b7e811e8891ccd42" providerId="LiveId" clId="{C4605D06-283C-4236-936F-60D609F647F8}" dt="2024-10-21T20:49:36.016" v="649" actId="20577"/>
-        <pc:sldMkLst>
-          <pc:docMk/>
-          <pc:sldMk cId="0" sldId="276"/>
-        </pc:sldMkLst>
-      </pc:sldChg>
-      <pc:sldChg chg="modSp mod">
-        <pc:chgData name="Norbey Muñoz" userId="b7e811e8891ccd42" providerId="LiveId" clId="{C4605D06-283C-4236-936F-60D609F647F8}" dt="2024-10-16T21:47:55.879" v="429" actId="20577"/>
-        <pc:sldMkLst>
-          <pc:docMk/>
-          <pc:sldMk cId="0" sldId="282"/>
-        </pc:sldMkLst>
-      </pc:sldChg>
-      <pc:sldChg chg="modSp mod">
-        <pc:chgData name="Norbey Muñoz" userId="b7e811e8891ccd42" providerId="LiveId" clId="{C4605D06-283C-4236-936F-60D609F647F8}" dt="2024-10-21T20:42:58.826" v="516" actId="27636"/>
-        <pc:sldMkLst>
-          <pc:docMk/>
-          <pc:sldMk cId="0" sldId="283"/>
-        </pc:sldMkLst>
-      </pc:sldChg>
-      <pc:sldChg chg="modSp mod modShow modNotesTx">
-        <pc:chgData name="Norbey Muñoz" userId="b7e811e8891ccd42" providerId="LiveId" clId="{C4605D06-283C-4236-936F-60D609F647F8}" dt="2024-10-21T20:48:13.138" v="639" actId="20577"/>
-        <pc:sldMkLst>
-          <pc:docMk/>
-          <pc:sldMk cId="631503244" sldId="290"/>
-        </pc:sldMkLst>
-      </pc:sldChg>
-      <pc:sldChg chg="modSp add mod modShow modNotesTx">
-        <pc:chgData name="Norbey Muñoz" userId="b7e811e8891ccd42" providerId="LiveId" clId="{C4605D06-283C-4236-936F-60D609F647F8}" dt="2024-10-21T20:48:24.365" v="642" actId="27636"/>
-        <pc:sldMkLst>
-          <pc:docMk/>
-          <pc:sldMk cId="3252179305" sldId="292"/>
-        </pc:sldMkLst>
-      </pc:sldChg>
-      <pc:sldChg chg="addSp delSp modSp add mod ord modShow chgLayout">
-        <pc:chgData name="Norbey Muñoz" userId="b7e811e8891ccd42" providerId="LiveId" clId="{C4605D06-283C-4236-936F-60D609F647F8}" dt="2024-10-21T20:47:38.909" v="613" actId="20577"/>
-        <pc:sldMkLst>
-          <pc:docMk/>
-          <pc:sldMk cId="4005061083" sldId="293"/>
-        </pc:sldMkLst>
-      </pc:sldChg>
-    </pc:docChg>
-  </pc:docChgLst>
-  <pc:docChgLst>
-    <pc:chgData name="NORBEY DANILO MUÑOZ CAÑON" userId="29f64d73-8b12-4c53-a9f3-1c223397a229" providerId="ADAL" clId="{278E59FD-C59D-4786-9890-5CAB351A8AA2}"/>
-    <pc:docChg chg="undo custSel addSld modSld sldOrd">
-      <pc:chgData name="NORBEY DANILO MUÑOZ CAÑON" userId="29f64d73-8b12-4c53-a9f3-1c223397a229" providerId="ADAL" clId="{278E59FD-C59D-4786-9890-5CAB351A8AA2}" dt="2024-04-16T00:30:31.442" v="800" actId="1076"/>
-      <pc:docMkLst>
-        <pc:docMk/>
-      </pc:docMkLst>
-      <pc:sldChg chg="addSp delSp modSp mod">
-        <pc:chgData name="NORBEY DANILO MUÑOZ CAÑON" userId="29f64d73-8b12-4c53-a9f3-1c223397a229" providerId="ADAL" clId="{278E59FD-C59D-4786-9890-5CAB351A8AA2}" dt="2024-04-10T21:33:02.710" v="1" actId="478"/>
-        <pc:sldMkLst>
-          <pc:docMk/>
-          <pc:sldMk cId="0" sldId="256"/>
-        </pc:sldMkLst>
-      </pc:sldChg>
-      <pc:sldChg chg="modSp mod">
-        <pc:chgData name="NORBEY DANILO MUÑOZ CAÑON" userId="29f64d73-8b12-4c53-a9f3-1c223397a229" providerId="ADAL" clId="{278E59FD-C59D-4786-9890-5CAB351A8AA2}" dt="2024-04-10T21:34:03.047" v="4" actId="20577"/>
-        <pc:sldMkLst>
-          <pc:docMk/>
-          <pc:sldMk cId="0" sldId="260"/>
-        </pc:sldMkLst>
-      </pc:sldChg>
-      <pc:sldChg chg="modSp mod">
-        <pc:chgData name="NORBEY DANILO MUÑOZ CAÑON" userId="29f64d73-8b12-4c53-a9f3-1c223397a229" providerId="ADAL" clId="{278E59FD-C59D-4786-9890-5CAB351A8AA2}" dt="2024-04-15T19:01:03.473" v="5" actId="20577"/>
-        <pc:sldMkLst>
-          <pc:docMk/>
-          <pc:sldMk cId="0" sldId="262"/>
-        </pc:sldMkLst>
-      </pc:sldChg>
-      <pc:sldChg chg="addSp modSp mod">
-        <pc:chgData name="NORBEY DANILO MUÑOZ CAÑON" userId="29f64d73-8b12-4c53-a9f3-1c223397a229" providerId="ADAL" clId="{278E59FD-C59D-4786-9890-5CAB351A8AA2}" dt="2024-04-15T21:01:07.346" v="789" actId="1076"/>
-        <pc:sldMkLst>
-          <pc:docMk/>
-          <pc:sldMk cId="0" sldId="266"/>
-        </pc:sldMkLst>
-      </pc:sldChg>
-      <pc:sldChg chg="modSp mod">
-        <pc:chgData name="NORBEY DANILO MUÑOZ CAÑON" userId="29f64d73-8b12-4c53-a9f3-1c223397a229" providerId="ADAL" clId="{278E59FD-C59D-4786-9890-5CAB351A8AA2}" dt="2024-04-15T21:03:56.559" v="793" actId="1076"/>
-        <pc:sldMkLst>
-          <pc:docMk/>
-          <pc:sldMk cId="0" sldId="267"/>
-        </pc:sldMkLst>
-      </pc:sldChg>
-      <pc:sldChg chg="modSp mod">
-        <pc:chgData name="NORBEY DANILO MUÑOZ CAÑON" userId="29f64d73-8b12-4c53-a9f3-1c223397a229" providerId="ADAL" clId="{278E59FD-C59D-4786-9890-5CAB351A8AA2}" dt="2024-04-15T20:55:41.828" v="753" actId="27636"/>
-        <pc:sldMkLst>
-          <pc:docMk/>
-          <pc:sldMk cId="0" sldId="270"/>
-        </pc:sldMkLst>
-      </pc:sldChg>
-      <pc:sldChg chg="modSp mod">
-        <pc:chgData name="NORBEY DANILO MUÑOZ CAÑON" userId="29f64d73-8b12-4c53-a9f3-1c223397a229" providerId="ADAL" clId="{278E59FD-C59D-4786-9890-5CAB351A8AA2}" dt="2024-04-15T19:20:48.826" v="7" actId="20577"/>
-        <pc:sldMkLst>
-          <pc:docMk/>
-          <pc:sldMk cId="0" sldId="271"/>
-        </pc:sldMkLst>
-      </pc:sldChg>
-      <pc:sldChg chg="modSp mod modNotesTx">
-        <pc:chgData name="NORBEY DANILO MUÑOZ CAÑON" userId="29f64d73-8b12-4c53-a9f3-1c223397a229" providerId="ADAL" clId="{278E59FD-C59D-4786-9890-5CAB351A8AA2}" dt="2024-04-15T21:04:20.393" v="795" actId="20577"/>
-        <pc:sldMkLst>
-          <pc:docMk/>
-          <pc:sldMk cId="0" sldId="276"/>
-        </pc:sldMkLst>
-      </pc:sldChg>
-      <pc:sldChg chg="delSp mod">
-        <pc:chgData name="NORBEY DANILO MUÑOZ CAÑON" userId="29f64d73-8b12-4c53-a9f3-1c223397a229" providerId="ADAL" clId="{278E59FD-C59D-4786-9890-5CAB351A8AA2}" dt="2024-04-15T19:34:53.580" v="10" actId="478"/>
-        <pc:sldMkLst>
-          <pc:docMk/>
-          <pc:sldMk cId="0" sldId="279"/>
-        </pc:sldMkLst>
-      </pc:sldChg>
-      <pc:sldChg chg="delSp mod">
-        <pc:chgData name="NORBEY DANILO MUÑOZ CAÑON" userId="29f64d73-8b12-4c53-a9f3-1c223397a229" providerId="ADAL" clId="{278E59FD-C59D-4786-9890-5CAB351A8AA2}" dt="2024-04-15T19:37:00.972" v="11" actId="478"/>
-        <pc:sldMkLst>
-          <pc:docMk/>
-          <pc:sldMk cId="0" sldId="280"/>
-        </pc:sldMkLst>
-      </pc:sldChg>
-      <pc:sldChg chg="modSp mod">
-        <pc:chgData name="NORBEY DANILO MUÑOZ CAÑON" userId="29f64d73-8b12-4c53-a9f3-1c223397a229" providerId="ADAL" clId="{278E59FD-C59D-4786-9890-5CAB351A8AA2}" dt="2024-04-15T20:55:41.872" v="754" actId="27636"/>
-        <pc:sldMkLst>
-          <pc:docMk/>
-          <pc:sldMk cId="0" sldId="283"/>
-        </pc:sldMkLst>
-      </pc:sldChg>
-      <pc:sldChg chg="delSp modSp add mod">
-        <pc:chgData name="NORBEY DANILO MUÑOZ CAÑON" userId="29f64d73-8b12-4c53-a9f3-1c223397a229" providerId="ADAL" clId="{278E59FD-C59D-4786-9890-5CAB351A8AA2}" dt="2024-04-15T19:45:29.243" v="133" actId="20577"/>
-        <pc:sldMkLst>
-          <pc:docMk/>
-          <pc:sldMk cId="3634067060" sldId="284"/>
-        </pc:sldMkLst>
-      </pc:sldChg>
-      <pc:sldChg chg="modSp add mod">
-        <pc:chgData name="NORBEY DANILO MUÑOZ CAÑON" userId="29f64d73-8b12-4c53-a9f3-1c223397a229" providerId="ADAL" clId="{278E59FD-C59D-4786-9890-5CAB351A8AA2}" dt="2024-04-15T19:49:59.253" v="168" actId="20577"/>
-        <pc:sldMkLst>
-          <pc:docMk/>
-          <pc:sldMk cId="4069713725" sldId="285"/>
-        </pc:sldMkLst>
-      </pc:sldChg>
-      <pc:sldChg chg="addSp delSp modSp add mod">
-        <pc:chgData name="NORBEY DANILO MUÑOZ CAÑON" userId="29f64d73-8b12-4c53-a9f3-1c223397a229" providerId="ADAL" clId="{278E59FD-C59D-4786-9890-5CAB351A8AA2}" dt="2024-04-15T19:50:27.994" v="174" actId="1076"/>
-        <pc:sldMkLst>
-          <pc:docMk/>
-          <pc:sldMk cId="246855685" sldId="286"/>
-        </pc:sldMkLst>
-      </pc:sldChg>
-      <pc:sldChg chg="modSp add mod ord">
-        <pc:chgData name="NORBEY DANILO MUÑOZ CAÑON" userId="29f64d73-8b12-4c53-a9f3-1c223397a229" providerId="ADAL" clId="{278E59FD-C59D-4786-9890-5CAB351A8AA2}" dt="2024-04-15T20:43:15.835" v="197" actId="20577"/>
-        <pc:sldMkLst>
-          <pc:docMk/>
-          <pc:sldMk cId="1336271864" sldId="287"/>
-        </pc:sldMkLst>
-      </pc:sldChg>
-      <pc:sldChg chg="modSp add mod">
-        <pc:chgData name="NORBEY DANILO MUÑOZ CAÑON" userId="29f64d73-8b12-4c53-a9f3-1c223397a229" providerId="ADAL" clId="{278E59FD-C59D-4786-9890-5CAB351A8AA2}" dt="2024-04-15T20:48:39.066" v="719" actId="20577"/>
-        <pc:sldMkLst>
-          <pc:docMk/>
-          <pc:sldMk cId="689534410" sldId="288"/>
-        </pc:sldMkLst>
-      </pc:sldChg>
-      <pc:sldChg chg="addSp modSp add mod modNotesTx">
-        <pc:chgData name="NORBEY DANILO MUÑOZ CAÑON" userId="29f64d73-8b12-4c53-a9f3-1c223397a229" providerId="ADAL" clId="{278E59FD-C59D-4786-9890-5CAB351A8AA2}" dt="2024-04-16T00:30:31.442" v="800" actId="1076"/>
-        <pc:sldMkLst>
-          <pc:docMk/>
-          <pc:sldMk cId="2853472517" sldId="289"/>
-        </pc:sldMkLst>
-      </pc:sldChg>
-      <pc:sldChg chg="addSp delSp modSp add mod">
-        <pc:chgData name="NORBEY DANILO MUÑOZ CAÑON" userId="29f64d73-8b12-4c53-a9f3-1c223397a229" providerId="ADAL" clId="{278E59FD-C59D-4786-9890-5CAB351A8AA2}" dt="2024-04-15T20:58:16.663" v="782" actId="1076"/>
-        <pc:sldMkLst>
-          <pc:docMk/>
-          <pc:sldMk cId="631503244" sldId="290"/>
-        </pc:sldMkLst>
-      </pc:sldChg>
-      <pc:sldChg chg="add">
-        <pc:chgData name="NORBEY DANILO MUÑOZ CAÑON" userId="29f64d73-8b12-4c53-a9f3-1c223397a229" providerId="ADAL" clId="{278E59FD-C59D-4786-9890-5CAB351A8AA2}" dt="2024-04-15T21:00:52.654" v="783" actId="2890"/>
-        <pc:sldMkLst>
-          <pc:docMk/>
-          <pc:sldMk cId="2999712654" sldId="291"/>
-        </pc:sldMkLst>
+        <pc:spChg chg="add del mod">
+          <ac:chgData name="Norbey Muñoz" userId="b7e811e8891ccd42" providerId="LiveId" clId="{7A9D10B8-45EB-48FB-89DA-3B884F36BEE7}" dt="2026-07-31T17:47:30.820" v="88" actId="478"/>
+          <ac:spMkLst>
+            <pc:docMk/>
+            <pc:sldMk cId="3367549514" sldId="294"/>
+            <ac:spMk id="4" creationId="{19B95E74-A69B-2822-49CF-C2551DD248C8}"/>
+          </ac:spMkLst>
+        </pc:spChg>
+        <pc:spChg chg="del">
+          <ac:chgData name="Norbey Muñoz" userId="b7e811e8891ccd42" providerId="LiveId" clId="{7A9D10B8-45EB-48FB-89DA-3B884F36BEE7}" dt="2026-07-31T17:47:29.561" v="86" actId="478"/>
+          <ac:spMkLst>
+            <pc:docMk/>
+            <pc:sldMk cId="3367549514" sldId="294"/>
+            <ac:spMk id="254" creationId="{F9477754-FB64-9BB0-C84D-8BE03EB97AE4}"/>
+          </ac:spMkLst>
+        </pc:spChg>
+        <pc:spChg chg="mod">
+          <ac:chgData name="Norbey Muñoz" userId="b7e811e8891ccd42" providerId="LiveId" clId="{7A9D10B8-45EB-48FB-89DA-3B884F36BEE7}" dt="2026-07-31T17:47:34.868" v="89" actId="1076"/>
+          <ac:spMkLst>
+            <pc:docMk/>
+            <pc:sldMk cId="3367549514" sldId="294"/>
+            <ac:spMk id="255" creationId="{7EB19E01-5578-D006-E4E7-10E4DBC36ED8}"/>
+          </ac:spMkLst>
+        </pc:spChg>
+        <pc:picChg chg="mod">
+          <ac:chgData name="Norbey Muñoz" userId="b7e811e8891ccd42" providerId="LiveId" clId="{7A9D10B8-45EB-48FB-89DA-3B884F36BEE7}" dt="2026-07-31T17:47:53.272" v="97" actId="1076"/>
+          <ac:picMkLst>
+            <pc:docMk/>
+            <pc:sldMk cId="3367549514" sldId="294"/>
+            <ac:picMk id="3" creationId="{AB61D810-F730-E94A-4FC0-EF2E52936C87}"/>
+          </ac:picMkLst>
+        </pc:picChg>
       </pc:sldChg>
     </pc:docChg>
   </pc:docChgLst>
@@ -4528,6 +4347,133 @@
         <p:cNvPr id="1" name="Shape 250">
           <a:extLst>
             <a:ext uri="{FF2B5EF4-FFF2-40B4-BE49-F238E27FC236}">
+              <a16:creationId xmlns:a16="http://schemas.microsoft.com/office/drawing/2014/main" id="{56930629-AC92-D87B-E0C9-504D478F9C8E}"/>
+            </a:ext>
+          </a:extLst>
+        </p:cNvPr>
+        <p:cNvGrpSpPr/>
+        <p:nvPr/>
+      </p:nvGrpSpPr>
+      <p:grpSpPr>
+        <a:xfrm>
+          <a:off x="0" y="0"/>
+          <a:ext cx="0" cy="0"/>
+          <a:chOff x="0" y="0"/>
+          <a:chExt cx="0" cy="0"/>
+        </a:xfrm>
+      </p:grpSpPr>
+      <p:sp>
+        <p:nvSpPr>
+          <p:cNvPr id="251" name="Google Shape;251;g1e958dd06e0_0_24:notes">
+            <a:extLst>
+              <a:ext uri="{FF2B5EF4-FFF2-40B4-BE49-F238E27FC236}">
+                <a16:creationId xmlns:a16="http://schemas.microsoft.com/office/drawing/2014/main" id="{45680E31-2792-EB9F-8FDC-4C7223054DE6}"/>
+              </a:ext>
+            </a:extLst>
+          </p:cNvPr>
+          <p:cNvSpPr>
+            <a:spLocks noGrp="1" noRot="1" noChangeAspect="1"/>
+          </p:cNvSpPr>
+          <p:nvPr>
+            <p:ph type="sldImg" idx="2"/>
+          </p:nvPr>
+        </p:nvSpPr>
+        <p:spPr>
+          <a:xfrm>
+            <a:off x="381000" y="685800"/>
+            <a:ext cx="6096000" cy="3429000"/>
+          </a:xfrm>
+          <a:custGeom>
+            <a:avLst/>
+            <a:gdLst/>
+            <a:ahLst/>
+            <a:cxnLst/>
+            <a:rect l="l" t="t" r="r" b="b"/>
+            <a:pathLst>
+              <a:path w="120000" h="120000" extrusionOk="0">
+                <a:moveTo>
+                  <a:pt x="0" y="0"/>
+                </a:moveTo>
+                <a:lnTo>
+                  <a:pt x="120000" y="0"/>
+                </a:lnTo>
+                <a:lnTo>
+                  <a:pt x="120000" y="120000"/>
+                </a:lnTo>
+                <a:lnTo>
+                  <a:pt x="0" y="120000"/>
+                </a:lnTo>
+                <a:close/>
+              </a:path>
+            </a:pathLst>
+          </a:custGeom>
+        </p:spPr>
+      </p:sp>
+      <p:sp>
+        <p:nvSpPr>
+          <p:cNvPr id="252" name="Google Shape;252;g1e958dd06e0_0_24:notes">
+            <a:extLst>
+              <a:ext uri="{FF2B5EF4-FFF2-40B4-BE49-F238E27FC236}">
+                <a16:creationId xmlns:a16="http://schemas.microsoft.com/office/drawing/2014/main" id="{632BB772-D7D1-19CA-1D67-6EE1B6111909}"/>
+              </a:ext>
+            </a:extLst>
+          </p:cNvPr>
+          <p:cNvSpPr txBox="1">
+            <a:spLocks noGrp="1"/>
+          </p:cNvSpPr>
+          <p:nvPr>
+            <p:ph type="body" idx="1"/>
+          </p:nvPr>
+        </p:nvSpPr>
+        <p:spPr>
+          <a:xfrm>
+            <a:off x="685800" y="4343400"/>
+            <a:ext cx="5486400" cy="4114800"/>
+          </a:xfrm>
+          <a:prstGeom prst="rect">
+            <a:avLst/>
+          </a:prstGeom>
+        </p:spPr>
+        <p:txBody>
+          <a:bodyPr spcFirstLastPara="1" wrap="square" lIns="91425" tIns="91425" rIns="91425" bIns="91425" anchor="t" anchorCtr="0">
+            <a:noAutofit/>
+          </a:bodyPr>
+          <a:lstStyle/>
+          <a:p>
+            <a:pPr marL="0" lvl="0" indent="0" algn="l" rtl="0">
+              <a:spcBef>
+                <a:spcPts val="0"/>
+              </a:spcBef>
+              <a:spcAft>
+                <a:spcPts val="0"/>
+              </a:spcAft>
+              <a:buNone/>
+            </a:pPr>
+            <a:endParaRPr dirty="0"/>
+          </a:p>
+        </p:txBody>
+      </p:sp>
+    </p:spTree>
+    <p:extLst>
+      <p:ext uri="{BB962C8B-B14F-4D97-AF65-F5344CB8AC3E}">
+        <p14:creationId xmlns:p14="http://schemas.microsoft.com/office/powerpoint/2010/main" val="1331764135"/>
+      </p:ext>
+    </p:extLst>
+  </p:cSld>
+  <p:clrMapOvr>
+    <a:masterClrMapping/>
+  </p:clrMapOvr>
+</p:notes>
+</file>
+
+<file path=ppt/notesSlides/notesSlide39.xml><?xml version="1.0" encoding="utf-8"?>
+<p:notes xmlns:a="http://schemas.openxmlformats.org/drawingml/2006/main" xmlns:r="http://schemas.openxmlformats.org/officeDocument/2006/relationships" xmlns:p="http://schemas.openxmlformats.org/presentationml/2006/main" showMasterSp="0" showMasterPhAnim="0">
+  <p:cSld>
+    <p:spTree>
+      <p:nvGrpSpPr>
+        <p:cNvPr id="1" name="Shape 250">
+          <a:extLst>
+            <a:ext uri="{FF2B5EF4-FFF2-40B4-BE49-F238E27FC236}">
               <a16:creationId xmlns:a16="http://schemas.microsoft.com/office/drawing/2014/main" id="{6E943DE8-448E-5945-ADD3-7EAB0D457656}"/>
             </a:ext>
           </a:extLst>
@@ -5832,7 +5778,7 @@
             </a:pPr>
             <a:fld id="{00000000-1234-1234-1234-123412341234}" type="slidenum">
               <a:rPr lang="es"/>
-              <a:t>‹#›</a:t>
+              <a:t>‹Nº›</a:t>
             </a:fld>
             <a:endParaRPr/>
           </a:p>
@@ -6299,7 +6245,7 @@
             </a:pPr>
             <a:fld id="{00000000-1234-1234-1234-123412341234}" type="slidenum">
               <a:rPr lang="es"/>
-              <a:t>‹#›</a:t>
+              <a:t>‹Nº›</a:t>
             </a:fld>
             <a:endParaRPr/>
           </a:p>
@@ -6403,7 +6349,7 @@
             </a:pPr>
             <a:fld id="{00000000-1234-1234-1234-123412341234}" type="slidenum">
               <a:rPr lang="es"/>
-              <a:t>‹#›</a:t>
+              <a:t>‹Nº›</a:t>
             </a:fld>
             <a:endParaRPr/>
           </a:p>
@@ -6712,7 +6658,7 @@
             </a:pPr>
             <a:fld id="{00000000-1234-1234-1234-123412341234}" type="slidenum">
               <a:rPr lang="es"/>
-              <a:t>‹#›</a:t>
+              <a:t>‹Nº›</a:t>
             </a:fld>
             <a:endParaRPr/>
           </a:p>
@@ -7114,7 +7060,7 @@
             </a:pPr>
             <a:fld id="{00000000-1234-1234-1234-123412341234}" type="slidenum">
               <a:rPr lang="es"/>
-              <a:t>‹#›</a:t>
+              <a:t>‹Nº›</a:t>
             </a:fld>
             <a:endParaRPr/>
           </a:p>
@@ -7605,7 +7551,7 @@
             </a:pPr>
             <a:fld id="{00000000-1234-1234-1234-123412341234}" type="slidenum">
               <a:rPr lang="es"/>
-              <a:t>‹#›</a:t>
+              <a:t>‹Nº›</a:t>
             </a:fld>
             <a:endParaRPr/>
           </a:p>
@@ -7838,7 +7784,7 @@
             </a:pPr>
             <a:fld id="{00000000-1234-1234-1234-123412341234}" type="slidenum">
               <a:rPr lang="es"/>
-              <a:t>‹#›</a:t>
+              <a:t>‹Nº›</a:t>
             </a:fld>
             <a:endParaRPr/>
           </a:p>
@@ -8200,7 +8146,7 @@
             </a:pPr>
             <a:fld id="{00000000-1234-1234-1234-123412341234}" type="slidenum">
               <a:rPr lang="es"/>
-              <a:t>‹#›</a:t>
+              <a:t>‹Nº›</a:t>
             </a:fld>
             <a:endParaRPr/>
           </a:p>
@@ -8504,7 +8450,7 @@
             </a:pPr>
             <a:fld id="{00000000-1234-1234-1234-123412341234}" type="slidenum">
               <a:rPr lang="es"/>
-              <a:t>‹#›</a:t>
+              <a:t>‹Nº›</a:t>
             </a:fld>
             <a:endParaRPr/>
           </a:p>
@@ -9187,7 +9133,7 @@
             </a:pPr>
             <a:fld id="{00000000-1234-1234-1234-123412341234}" type="slidenum">
               <a:rPr lang="es"/>
-              <a:t>‹#›</a:t>
+              <a:t>‹Nº›</a:t>
             </a:fld>
             <a:endParaRPr/>
           </a:p>
@@ -9341,7 +9287,7 @@
             </a:pPr>
             <a:fld id="{00000000-1234-1234-1234-123412341234}" type="slidenum">
               <a:rPr lang="es"/>
-              <a:t>‹#›</a:t>
+              <a:t>‹Nº›</a:t>
             </a:fld>
             <a:endParaRPr/>
           </a:p>
@@ -10038,7 +9984,7 @@
             </a:pPr>
             <a:fld id="{00000000-1234-1234-1234-123412341234}" type="slidenum">
               <a:rPr lang="es"/>
-              <a:t>‹#›</a:t>
+              <a:t>‹Nº›</a:t>
             </a:fld>
             <a:endParaRPr/>
           </a:p>
@@ -16432,6 +16378,121 @@
 </file>
 
 <file path=ppt/slides/slide38.xml><?xml version="1.0" encoding="utf-8"?>
+<p:sld xmlns:a="http://schemas.openxmlformats.org/drawingml/2006/main" xmlns:r="http://schemas.openxmlformats.org/officeDocument/2006/relationships" xmlns:p="http://schemas.openxmlformats.org/presentationml/2006/main">
+  <p:cSld>
+    <p:spTree>
+      <p:nvGrpSpPr>
+        <p:cNvPr id="1" name="Shape 253">
+          <a:extLst>
+            <a:ext uri="{FF2B5EF4-FFF2-40B4-BE49-F238E27FC236}">
+              <a16:creationId xmlns:a16="http://schemas.microsoft.com/office/drawing/2014/main" id="{DBBEB12E-D382-073F-D074-C8069DBC4026}"/>
+            </a:ext>
+          </a:extLst>
+        </p:cNvPr>
+        <p:cNvGrpSpPr/>
+        <p:nvPr/>
+      </p:nvGrpSpPr>
+      <p:grpSpPr>
+        <a:xfrm>
+          <a:off x="0" y="0"/>
+          <a:ext cx="0" cy="0"/>
+          <a:chOff x="0" y="0"/>
+          <a:chExt cx="0" cy="0"/>
+        </a:xfrm>
+      </p:grpSpPr>
+      <p:sp>
+        <p:nvSpPr>
+          <p:cNvPr id="255" name="Google Shape;255;p40">
+            <a:extLst>
+              <a:ext uri="{FF2B5EF4-FFF2-40B4-BE49-F238E27FC236}">
+                <a16:creationId xmlns:a16="http://schemas.microsoft.com/office/drawing/2014/main" id="{7EB19E01-5578-D006-E4E7-10E4DBC36ED8}"/>
+              </a:ext>
+            </a:extLst>
+          </p:cNvPr>
+          <p:cNvSpPr txBox="1">
+            <a:spLocks noGrp="1"/>
+          </p:cNvSpPr>
+          <p:nvPr>
+            <p:ph type="body" idx="1"/>
+          </p:nvPr>
+        </p:nvSpPr>
+        <p:spPr>
+          <a:xfrm>
+            <a:off x="311699" y="165494"/>
+            <a:ext cx="8520600" cy="3302700"/>
+          </a:xfrm>
+          <a:prstGeom prst="rect">
+            <a:avLst/>
+          </a:prstGeom>
+        </p:spPr>
+        <p:txBody>
+          <a:bodyPr spcFirstLastPara="1" wrap="square" lIns="91425" tIns="91425" rIns="91425" bIns="91425" anchor="t" anchorCtr="0">
+            <a:normAutofit/>
+          </a:bodyPr>
+          <a:lstStyle/>
+          <a:p>
+            <a:pPr marL="0" lvl="0" indent="0" algn="just" rtl="0">
+              <a:lnSpc>
+                <a:spcPct val="105000"/>
+              </a:lnSpc>
+              <a:spcBef>
+                <a:spcPts val="0"/>
+              </a:spcBef>
+              <a:spcAft>
+                <a:spcPts val="0"/>
+              </a:spcAft>
+              <a:buNone/>
+            </a:pPr>
+            <a:r>
+              <a:rPr lang="es-ES" sz="1500" dirty="0"/>
+              <a:t>Encontrar la solución óptima, para ir de Linz a Ulm usando la técnica de búsqueda A* con memoria, es decir tener en cuenta los otros caminos más cortos por explorar, a partir del siguiente mapa de Alemania, en dónde deberá tener en cuenta el conocimiento previo de la distancia en línea recta de todas las ciudades hacía Ulm como heurística, partiendo de la premisa que aquella que sea menor deberá ser considerada antes que las anteriores:</a:t>
+            </a:r>
+          </a:p>
+        </p:txBody>
+      </p:sp>
+      <p:pic>
+        <p:nvPicPr>
+          <p:cNvPr id="3" name="Imagen 2">
+            <a:extLst>
+              <a:ext uri="{FF2B5EF4-FFF2-40B4-BE49-F238E27FC236}">
+                <a16:creationId xmlns:a16="http://schemas.microsoft.com/office/drawing/2014/main" id="{AB61D810-F730-E94A-4FC0-EF2E52936C87}"/>
+              </a:ext>
+            </a:extLst>
+          </p:cNvPr>
+          <p:cNvPicPr>
+            <a:picLocks noChangeAspect="1"/>
+          </p:cNvPicPr>
+          <p:nvPr/>
+        </p:nvPicPr>
+        <p:blipFill rotWithShape="1">
+          <a:blip r:embed="rId3"/>
+          <a:srcRect t="8334" b="3271"/>
+          <a:stretch/>
+        </p:blipFill>
+        <p:spPr>
+          <a:xfrm>
+            <a:off x="1294759" y="1602113"/>
+            <a:ext cx="6554481" cy="3375893"/>
+          </a:xfrm>
+          <a:prstGeom prst="rect">
+            <a:avLst/>
+          </a:prstGeom>
+        </p:spPr>
+      </p:pic>
+    </p:spTree>
+    <p:extLst>
+      <p:ext uri="{BB962C8B-B14F-4D97-AF65-F5344CB8AC3E}">
+        <p14:creationId xmlns:p14="http://schemas.microsoft.com/office/powerpoint/2010/main" val="3367549514"/>
+      </p:ext>
+    </p:extLst>
+  </p:cSld>
+  <p:clrMapOvr>
+    <a:masterClrMapping/>
+  </p:clrMapOvr>
+</p:sld>
+</file>
+
+<file path=ppt/slides/slide39.xml><?xml version="1.0" encoding="utf-8"?>
 <p:sld xmlns:a="http://schemas.openxmlformats.org/drawingml/2006/main" xmlns:r="http://schemas.openxmlformats.org/officeDocument/2006/relationships" xmlns:p="http://schemas.openxmlformats.org/presentationml/2006/main" show="0">
   <p:cSld>
     <p:spTree>
